--- a/ICE_AP_Intake_Executive_Summary_20261026.pptx
+++ b/ICE_AP_Intake_Executive_Summary_20261026.pptx
@@ -6058,7 +6058,7 @@
                 </a:solidFill>
                 <a:latin typeface="Arial"/>
               </a:rPr>
-              <a:t>Director (Engagement Lead)</a:t>
+              <a:t>Project Manager (Engagement Lead)</a:t>
             </a:r>
           </a:p>
         </p:txBody>
@@ -6358,7 +6358,7 @@
                 </a:solidFill>
                 <a:latin typeface="Arial"/>
               </a:rPr>
-              <a:t>Manager - Developer (Solution Architect)</a:t>
+              <a:t>Data Scientist III (Solution Architect)</a:t>
             </a:r>
           </a:p>
         </p:txBody>
@@ -6658,7 +6658,7 @@
                 </a:solidFill>
                 <a:latin typeface="Arial"/>
               </a:rPr>
-              <a:t>Senior (Business Analyst and AP Process Specialist)</a:t>
+              <a:t>Process Improvement Specialist II (AP Business Analyst)</a:t>
             </a:r>
           </a:p>
         </p:txBody>
@@ -6958,7 +6958,7 @@
                 </a:solidFill>
                 <a:latin typeface="Arial"/>
               </a:rPr>
-              <a:t>Senior - Developer (AI/ML)</a:t>
+              <a:t>Data Scientist II (AI/ML)</a:t>
             </a:r>
           </a:p>
         </p:txBody>
@@ -7258,7 +7258,7 @@
                 </a:solidFill>
                 <a:latin typeface="Arial"/>
               </a:rPr>
-              <a:t>Senior - Developer (Full Stack)</a:t>
+              <a:t>Data Scientist II (Full Stack)</a:t>
             </a:r>
           </a:p>
         </p:txBody>
@@ -7549,7 +7549,7 @@
                 </a:solidFill>
                 <a:latin typeface="Arial"/>
               </a:rPr>
-              <a:t>Senior - Developer (Test and Quality Lead)</a:t>
+              <a:t>Data Scientist II (Test and Quality Lead)</a:t>
             </a:r>
           </a:p>
         </p:txBody>
@@ -7822,7 +7822,7 @@
                 </a:solidFill>
                 <a:latin typeface="Arial"/>
               </a:rPr>
-              <a:t>Senior (Change Management and Training Lead)</a:t>
+              <a:t>Process Improvement Specialist II (Change and Training Lead)</a:t>
             </a:r>
           </a:p>
         </p:txBody>
@@ -8659,10 +8659,10 @@
                 <a:tableStyleId>{5C22544A-7EE6-4342-B048-85BDC9FD1C3A}</a:tableStyleId>
               </a:tblPr>
               <a:tblGrid>
-                <a:gridCol w="2651760"/>
-                <a:gridCol w="1005840"/>
-                <a:gridCol w="1005840"/>
-                <a:gridCol w="1005840"/>
+                <a:gridCol w="3017520"/>
+                <a:gridCol w="886968"/>
+                <a:gridCol w="886968"/>
+                <a:gridCol w="877824"/>
               </a:tblGrid>
               <a:tr h="365760">
                 <a:tc>
@@ -8772,7 +8772,7 @@
                           </a:solidFill>
                           <a:latin typeface="Arial"/>
                         </a:rPr>
-                        <a:t>Director</a:t>
+                        <a:t>Project Manager</a:t>
                       </a:r>
                     </a:p>
                   </a:txBody>
@@ -8795,7 +8795,7 @@
                           </a:solidFill>
                           <a:latin typeface="Arial"/>
                         </a:rPr>
-                        <a:t>$188.20</a:t>
+                        <a:t>$241.50</a:t>
                       </a:r>
                     </a:p>
                   </a:txBody>
@@ -8818,7 +8818,7 @@
                           </a:solidFill>
                           <a:latin typeface="Arial"/>
                         </a:rPr>
-                        <a:t>$193.85</a:t>
+                        <a:t>$248.74</a:t>
                       </a:r>
                     </a:p>
                   </a:txBody>
@@ -8841,7 +8841,7 @@
                           </a:solidFill>
                           <a:latin typeface="Arial"/>
                         </a:rPr>
-                        <a:t>$199.67</a:t>
+                        <a:t>$256.21</a:t>
                       </a:r>
                     </a:p>
                   </a:txBody>
@@ -8866,7 +8866,7 @@
                           </a:solidFill>
                           <a:latin typeface="Arial"/>
                         </a:rPr>
-                        <a:t>Manager - Developer</a:t>
+                        <a:t>Data Scientist III</a:t>
                       </a:r>
                     </a:p>
                   </a:txBody>
@@ -8889,7 +8889,7 @@
                           </a:solidFill>
                           <a:latin typeface="Arial"/>
                         </a:rPr>
-                        <a:t>$194.37</a:t>
+                        <a:t>$183.08</a:t>
                       </a:r>
                     </a:p>
                   </a:txBody>
@@ -8912,7 +8912,7 @@
                           </a:solidFill>
                           <a:latin typeface="Arial"/>
                         </a:rPr>
-                        <a:t>$200.20</a:t>
+                        <a:t>$188.57</a:t>
                       </a:r>
                     </a:p>
                   </a:txBody>
@@ -8935,7 +8935,7 @@
                           </a:solidFill>
                           <a:latin typeface="Arial"/>
                         </a:rPr>
-                        <a:t>$206.21</a:t>
+                        <a:t>$194.23</a:t>
                       </a:r>
                     </a:p>
                   </a:txBody>
@@ -8960,7 +8960,7 @@
                           </a:solidFill>
                           <a:latin typeface="Arial"/>
                         </a:rPr>
-                        <a:t>Senior</a:t>
+                        <a:t>Process Improvement Specialist II</a:t>
                       </a:r>
                     </a:p>
                   </a:txBody>
@@ -8983,7 +8983,7 @@
                           </a:solidFill>
                           <a:latin typeface="Arial"/>
                         </a:rPr>
-                        <a:t>$117.65</a:t>
+                        <a:t>$155.40</a:t>
                       </a:r>
                     </a:p>
                   </a:txBody>
@@ -9006,7 +9006,7 @@
                           </a:solidFill>
                           <a:latin typeface="Arial"/>
                         </a:rPr>
-                        <a:t>$121.18</a:t>
+                        <a:t>$160.06</a:t>
                       </a:r>
                     </a:p>
                   </a:txBody>
@@ -9029,7 +9029,7 @@
                           </a:solidFill>
                           <a:latin typeface="Arial"/>
                         </a:rPr>
-                        <a:t>$124.82</a:t>
+                        <a:t>$164.86</a:t>
                       </a:r>
                     </a:p>
                   </a:txBody>
@@ -9054,7 +9054,7 @@
                           </a:solidFill>
                           <a:latin typeface="Arial"/>
                         </a:rPr>
-                        <a:t>Senior - Developer</a:t>
+                        <a:t>Data Scientist II</a:t>
                       </a:r>
                     </a:p>
                   </a:txBody>
@@ -9077,7 +9077,7 @@
                           </a:solidFill>
                           <a:latin typeface="Arial"/>
                         </a:rPr>
-                        <a:t>$145.26</a:t>
+                        <a:t>$166.57</a:t>
                       </a:r>
                     </a:p>
                   </a:txBody>
@@ -9100,7 +9100,7 @@
                           </a:solidFill>
                           <a:latin typeface="Arial"/>
                         </a:rPr>
-                        <a:t>$149.62</a:t>
+                        <a:t>$171.57</a:t>
                       </a:r>
                     </a:p>
                   </a:txBody>
@@ -9123,7 +9123,7 @@
                           </a:solidFill>
                           <a:latin typeface="Arial"/>
                         </a:rPr>
-                        <a:t>$154.11</a:t>
+                        <a:t>$176.72</a:t>
                       </a:r>
                     </a:p>
                   </a:txBody>
@@ -9308,7 +9308,7 @@
                 </a:solidFill>
                 <a:latin typeface="Arial"/>
               </a:rPr>
-              <a:t>$248,049.70</a:t>
+              <a:t>$285,892.80</a:t>
             </a:r>
           </a:p>
           <a:p>
@@ -9397,7 +9397,7 @@
                 </a:solidFill>
                 <a:latin typeface="Arial"/>
               </a:rPr>
-              <a:t>$295,105.20</a:t>
+              <a:t>$332,068.80</a:t>
             </a:r>
           </a:p>
           <a:p>
@@ -9486,7 +9486,7 @@
                 </a:solidFill>
                 <a:latin typeface="Arial"/>
               </a:rPr>
-              <a:t>$391,187.20</a:t>
+              <a:t>$459,619.20</a:t>
             </a:r>
           </a:p>
           <a:p>
@@ -9542,7 +9542,7 @@
                 </a:solidFill>
                 <a:latin typeface="Arial"/>
               </a:rPr>
-              <a:t>about $543,000 with the pilot; about $934,000 with production and rollout. No other direct costs.</a:t>
+              <a:t>about $618,000 with the pilot; about $1,078,000 with production and rollout. No other direct costs.</a:t>
             </a:r>
           </a:p>
         </p:txBody>
